--- a/2026/Desain/Desain.pptx
+++ b/2026/Desain/Desain.pptx
@@ -200,7 +200,7 @@
           <a:p>
             <a:fld id="{3632E96E-41F7-40C5-8419-297958CC00FA}" type="datetimeFigureOut">
               <a:rPr lang="en-US" smtClean="0"/>
-              <a:t>6/16/2026</a:t>
+              <a:t>6/17/2026</a:t>
             </a:fld>
             <a:endParaRPr lang="en-US"/>
           </a:p>
@@ -690,7 +690,7 @@
           <a:p>
             <a:fld id="{BCC18F51-09EC-435C-A3BA-64A766E099C0}" type="datetimeFigureOut">
               <a:rPr lang="en-US" smtClean="0"/>
-              <a:t>6/16/2026</a:t>
+              <a:t>6/17/2026</a:t>
             </a:fld>
             <a:endParaRPr lang="en-US"/>
           </a:p>
@@ -860,7 +860,7 @@
           <a:p>
             <a:fld id="{BCC18F51-09EC-435C-A3BA-64A766E099C0}" type="datetimeFigureOut">
               <a:rPr lang="en-US" smtClean="0"/>
-              <a:t>6/16/2026</a:t>
+              <a:t>6/17/2026</a:t>
             </a:fld>
             <a:endParaRPr lang="en-US"/>
           </a:p>
@@ -1040,7 +1040,7 @@
           <a:p>
             <a:fld id="{BCC18F51-09EC-435C-A3BA-64A766E099C0}" type="datetimeFigureOut">
               <a:rPr lang="en-US" smtClean="0"/>
-              <a:t>6/16/2026</a:t>
+              <a:t>6/17/2026</a:t>
             </a:fld>
             <a:endParaRPr lang="en-US"/>
           </a:p>
@@ -1210,7 +1210,7 @@
           <a:p>
             <a:fld id="{BCC18F51-09EC-435C-A3BA-64A766E099C0}" type="datetimeFigureOut">
               <a:rPr lang="en-US" smtClean="0"/>
-              <a:t>6/16/2026</a:t>
+              <a:t>6/17/2026</a:t>
             </a:fld>
             <a:endParaRPr lang="en-US"/>
           </a:p>
@@ -1456,7 +1456,7 @@
           <a:p>
             <a:fld id="{BCC18F51-09EC-435C-A3BA-64A766E099C0}" type="datetimeFigureOut">
               <a:rPr lang="en-US" smtClean="0"/>
-              <a:t>6/16/2026</a:t>
+              <a:t>6/17/2026</a:t>
             </a:fld>
             <a:endParaRPr lang="en-US"/>
           </a:p>
@@ -1688,7 +1688,7 @@
           <a:p>
             <a:fld id="{BCC18F51-09EC-435C-A3BA-64A766E099C0}" type="datetimeFigureOut">
               <a:rPr lang="en-US" smtClean="0"/>
-              <a:t>6/16/2026</a:t>
+              <a:t>6/17/2026</a:t>
             </a:fld>
             <a:endParaRPr lang="en-US"/>
           </a:p>
@@ -2055,7 +2055,7 @@
           <a:p>
             <a:fld id="{BCC18F51-09EC-435C-A3BA-64A766E099C0}" type="datetimeFigureOut">
               <a:rPr lang="en-US" smtClean="0"/>
-              <a:t>6/16/2026</a:t>
+              <a:t>6/17/2026</a:t>
             </a:fld>
             <a:endParaRPr lang="en-US"/>
           </a:p>
@@ -2173,7 +2173,7 @@
           <a:p>
             <a:fld id="{BCC18F51-09EC-435C-A3BA-64A766E099C0}" type="datetimeFigureOut">
               <a:rPr lang="en-US" smtClean="0"/>
-              <a:t>6/16/2026</a:t>
+              <a:t>6/17/2026</a:t>
             </a:fld>
             <a:endParaRPr lang="en-US"/>
           </a:p>
@@ -2268,7 +2268,7 @@
           <a:p>
             <a:fld id="{BCC18F51-09EC-435C-A3BA-64A766E099C0}" type="datetimeFigureOut">
               <a:rPr lang="en-US" smtClean="0"/>
-              <a:t>6/16/2026</a:t>
+              <a:t>6/17/2026</a:t>
             </a:fld>
             <a:endParaRPr lang="en-US"/>
           </a:p>
@@ -2545,7 +2545,7 @@
           <a:p>
             <a:fld id="{BCC18F51-09EC-435C-A3BA-64A766E099C0}" type="datetimeFigureOut">
               <a:rPr lang="en-US" smtClean="0"/>
-              <a:t>6/16/2026</a:t>
+              <a:t>6/17/2026</a:t>
             </a:fld>
             <a:endParaRPr lang="en-US"/>
           </a:p>
@@ -2802,7 +2802,7 @@
           <a:p>
             <a:fld id="{BCC18F51-09EC-435C-A3BA-64A766E099C0}" type="datetimeFigureOut">
               <a:rPr lang="en-US" smtClean="0"/>
-              <a:t>6/16/2026</a:t>
+              <a:t>6/17/2026</a:t>
             </a:fld>
             <a:endParaRPr lang="en-US"/>
           </a:p>
@@ -3015,7 +3015,7 @@
           <a:p>
             <a:fld id="{BCC18F51-09EC-435C-A3BA-64A766E099C0}" type="datetimeFigureOut">
               <a:rPr lang="en-US" smtClean="0"/>
-              <a:t>6/16/2026</a:t>
+              <a:t>6/17/2026</a:t>
             </a:fld>
             <a:endParaRPr lang="en-US"/>
           </a:p>
@@ -3473,7 +3473,7 @@
           <p:nvPr/>
         </p:nvPicPr>
         <p:blipFill>
-          <a:blip r:embed="rId3">
+          <a:blip r:embed="rId5">
             <a:extLst>
               <a:ext uri="{28A0092B-C50C-407E-A947-70E740481C1C}">
                 <a14:useLocalDpi xmlns:a14="http://schemas.microsoft.com/office/drawing/2010/main" val="0"/>
@@ -3494,36 +3494,391 @@
           </a:prstGeom>
         </p:spPr>
       </p:pic>
+      <p:sp>
+        <p:nvSpPr>
+          <p:cNvPr id="4" name="TextBox 3">
+            <a:extLst>
+              <a:ext uri="{FF2B5EF4-FFF2-40B4-BE49-F238E27FC236}">
+                <a16:creationId xmlns:a16="http://schemas.microsoft.com/office/drawing/2014/main" id="{038ED9C3-F5AC-25F2-2C63-56BD73949219}"/>
+              </a:ext>
+            </a:extLst>
+          </p:cNvPr>
+          <p:cNvSpPr txBox="1"/>
+          <p:nvPr/>
+        </p:nvSpPr>
+        <p:spPr>
+          <a:xfrm>
+            <a:off x="836578" y="654481"/>
+            <a:ext cx="6254437" cy="707886"/>
+          </a:xfrm>
+          <a:prstGeom prst="rect">
+            <a:avLst/>
+          </a:prstGeom>
+          <a:noFill/>
+        </p:spPr>
+        <p:txBody>
+          <a:bodyPr wrap="square" rtlCol="0">
+            <a:spAutoFit/>
+          </a:bodyPr>
+          <a:lstStyle/>
+          <a:p>
+            <a:r>
+              <a:rPr lang="en-US" sz="4000">
+                <a:solidFill>
+                  <a:schemeClr val="bg1"/>
+                </a:solidFill>
+                <a:latin typeface="Aero" panose="02000603090000090004" pitchFamily="2" charset="0"/>
+              </a:rPr>
+              <a:t>NAMA WISUDAWAN</a:t>
+            </a:r>
+          </a:p>
+        </p:txBody>
+      </p:sp>
+      <p:sp>
+        <p:nvSpPr>
+          <p:cNvPr id="6" name="TextBox 5">
+            <a:extLst>
+              <a:ext uri="{FF2B5EF4-FFF2-40B4-BE49-F238E27FC236}">
+                <a16:creationId xmlns:a16="http://schemas.microsoft.com/office/drawing/2014/main" id="{4DDF1360-B970-F399-6725-28B182998CA0}"/>
+              </a:ext>
+            </a:extLst>
+          </p:cNvPr>
+          <p:cNvSpPr txBox="1"/>
+          <p:nvPr/>
+        </p:nvSpPr>
+        <p:spPr>
+          <a:xfrm>
+            <a:off x="836579" y="1455657"/>
+            <a:ext cx="5259421" cy="323165"/>
+          </a:xfrm>
+          <a:prstGeom prst="rect">
+            <a:avLst/>
+          </a:prstGeom>
+          <a:noFill/>
+        </p:spPr>
+        <p:txBody>
+          <a:bodyPr wrap="square" rtlCol="0">
+            <a:spAutoFit/>
+          </a:bodyPr>
+          <a:lstStyle/>
+          <a:p>
+            <a:r>
+              <a:rPr lang="en-US" sz="1500">
+                <a:solidFill>
+                  <a:schemeClr val="bg1"/>
+                </a:solidFill>
+                <a:latin typeface="Aero" panose="02000603090000090004" pitchFamily="2" charset="0"/>
+              </a:rPr>
+              <a:t>NIS :</a:t>
+            </a:r>
+          </a:p>
+        </p:txBody>
+      </p:sp>
+      <p:sp>
+        <p:nvSpPr>
+          <p:cNvPr id="7" name="TextBox 6">
+            <a:extLst>
+              <a:ext uri="{FF2B5EF4-FFF2-40B4-BE49-F238E27FC236}">
+                <a16:creationId xmlns:a16="http://schemas.microsoft.com/office/drawing/2014/main" id="{9FBCF99E-26BE-2B5D-9091-527699E02E77}"/>
+              </a:ext>
+            </a:extLst>
+          </p:cNvPr>
+          <p:cNvSpPr txBox="1"/>
+          <p:nvPr/>
+        </p:nvSpPr>
+        <p:spPr>
+          <a:xfrm>
+            <a:off x="836577" y="2249176"/>
+            <a:ext cx="5259421" cy="323165"/>
+          </a:xfrm>
+          <a:prstGeom prst="rect">
+            <a:avLst/>
+          </a:prstGeom>
+          <a:noFill/>
+        </p:spPr>
+        <p:txBody>
+          <a:bodyPr wrap="square" rtlCol="0">
+            <a:spAutoFit/>
+          </a:bodyPr>
+          <a:lstStyle/>
+          <a:p>
+            <a:r>
+              <a:rPr lang="en-US" sz="1500">
+                <a:solidFill>
+                  <a:schemeClr val="bg1"/>
+                </a:solidFill>
+              </a:rPr>
+              <a:t>AYAH :</a:t>
+            </a:r>
+          </a:p>
+        </p:txBody>
+      </p:sp>
+      <p:sp>
+        <p:nvSpPr>
+          <p:cNvPr id="8" name="TextBox 7">
+            <a:extLst>
+              <a:ext uri="{FF2B5EF4-FFF2-40B4-BE49-F238E27FC236}">
+                <a16:creationId xmlns:a16="http://schemas.microsoft.com/office/drawing/2014/main" id="{27EEC4DA-3670-3548-30D4-989362694798}"/>
+              </a:ext>
+            </a:extLst>
+          </p:cNvPr>
+          <p:cNvSpPr txBox="1"/>
+          <p:nvPr/>
+        </p:nvSpPr>
+        <p:spPr>
+          <a:xfrm>
+            <a:off x="834508" y="2572341"/>
+            <a:ext cx="5259420" cy="323165"/>
+          </a:xfrm>
+          <a:prstGeom prst="rect">
+            <a:avLst/>
+          </a:prstGeom>
+          <a:noFill/>
+        </p:spPr>
+        <p:txBody>
+          <a:bodyPr wrap="square" rtlCol="0">
+            <a:spAutoFit/>
+          </a:bodyPr>
+          <a:lstStyle/>
+          <a:p>
+            <a:r>
+              <a:rPr lang="en-US" sz="1500">
+                <a:solidFill>
+                  <a:schemeClr val="bg1"/>
+                </a:solidFill>
+              </a:rPr>
+              <a:t>IBU :</a:t>
+            </a:r>
+          </a:p>
+        </p:txBody>
+      </p:sp>
+      <p:sp>
+        <p:nvSpPr>
+          <p:cNvPr id="9" name="TextBox 8">
+            <a:extLst>
+              <a:ext uri="{FF2B5EF4-FFF2-40B4-BE49-F238E27FC236}">
+                <a16:creationId xmlns:a16="http://schemas.microsoft.com/office/drawing/2014/main" id="{37A24AE4-AB9D-B0A0-A700-07FBEFF67C9C}"/>
+              </a:ext>
+            </a:extLst>
+          </p:cNvPr>
+          <p:cNvSpPr txBox="1"/>
+          <p:nvPr/>
+        </p:nvSpPr>
+        <p:spPr>
+          <a:xfrm>
+            <a:off x="834508" y="2895506"/>
+            <a:ext cx="5259420" cy="323165"/>
+          </a:xfrm>
+          <a:prstGeom prst="rect">
+            <a:avLst/>
+          </a:prstGeom>
+          <a:noFill/>
+        </p:spPr>
+        <p:txBody>
+          <a:bodyPr wrap="square" rtlCol="0">
+            <a:spAutoFit/>
+          </a:bodyPr>
+          <a:lstStyle/>
+          <a:p>
+            <a:r>
+              <a:rPr lang="en-US" sz="1500">
+                <a:solidFill>
+                  <a:schemeClr val="bg1"/>
+                </a:solidFill>
+              </a:rPr>
+              <a:t>TTL :</a:t>
+            </a:r>
+          </a:p>
+        </p:txBody>
+      </p:sp>
+      <p:sp>
+        <p:nvSpPr>
+          <p:cNvPr id="10" name="TextBox 9">
+            <a:extLst>
+              <a:ext uri="{FF2B5EF4-FFF2-40B4-BE49-F238E27FC236}">
+                <a16:creationId xmlns:a16="http://schemas.microsoft.com/office/drawing/2014/main" id="{5FD23990-C75A-B82E-DCFC-B05750EBADB5}"/>
+              </a:ext>
+            </a:extLst>
+          </p:cNvPr>
+          <p:cNvSpPr txBox="1"/>
+          <p:nvPr/>
+        </p:nvSpPr>
+        <p:spPr>
+          <a:xfrm>
+            <a:off x="834509" y="3186798"/>
+            <a:ext cx="5259419" cy="323165"/>
+          </a:xfrm>
+          <a:prstGeom prst="rect">
+            <a:avLst/>
+          </a:prstGeom>
+          <a:noFill/>
+        </p:spPr>
+        <p:txBody>
+          <a:bodyPr wrap="square" rtlCol="0">
+            <a:spAutoFit/>
+          </a:bodyPr>
+          <a:lstStyle/>
+          <a:p>
+            <a:r>
+              <a:rPr lang="en-US" sz="1500">
+                <a:solidFill>
+                  <a:schemeClr val="bg1"/>
+                </a:solidFill>
+              </a:rPr>
+              <a:t>HOBI :</a:t>
+            </a:r>
+          </a:p>
+        </p:txBody>
+      </p:sp>
+      <p:sp>
+        <p:nvSpPr>
+          <p:cNvPr id="11" name="TextBox 10">
+            <a:extLst>
+              <a:ext uri="{FF2B5EF4-FFF2-40B4-BE49-F238E27FC236}">
+                <a16:creationId xmlns:a16="http://schemas.microsoft.com/office/drawing/2014/main" id="{31AAE84A-DBA4-3350-E4FD-D54BD5B3C40D}"/>
+              </a:ext>
+            </a:extLst>
+          </p:cNvPr>
+          <p:cNvSpPr txBox="1"/>
+          <p:nvPr/>
+        </p:nvSpPr>
+        <p:spPr>
+          <a:xfrm>
+            <a:off x="834508" y="5402343"/>
+            <a:ext cx="5259418" cy="323165"/>
+          </a:xfrm>
+          <a:prstGeom prst="rect">
+            <a:avLst/>
+          </a:prstGeom>
+          <a:noFill/>
+        </p:spPr>
+        <p:txBody>
+          <a:bodyPr wrap="square" rtlCol="0">
+            <a:spAutoFit/>
+          </a:bodyPr>
+          <a:lstStyle/>
+          <a:p>
+            <a:r>
+              <a:rPr lang="en-US" sz="1500">
+                <a:solidFill>
+                  <a:schemeClr val="bg1"/>
+                </a:solidFill>
+              </a:rPr>
+              <a:t>CITA - CITA :</a:t>
+            </a:r>
+          </a:p>
+        </p:txBody>
+      </p:sp>
+      <p:sp>
+        <p:nvSpPr>
+          <p:cNvPr id="12" name="TextBox 11">
+            <a:extLst>
+              <a:ext uri="{FF2B5EF4-FFF2-40B4-BE49-F238E27FC236}">
+                <a16:creationId xmlns:a16="http://schemas.microsoft.com/office/drawing/2014/main" id="{80769C75-0308-6764-0517-0234A1FD693A}"/>
+              </a:ext>
+            </a:extLst>
+          </p:cNvPr>
+          <p:cNvSpPr txBox="1"/>
+          <p:nvPr/>
+        </p:nvSpPr>
+        <p:spPr>
+          <a:xfrm>
+            <a:off x="834508" y="3509975"/>
+            <a:ext cx="5259418" cy="323165"/>
+          </a:xfrm>
+          <a:prstGeom prst="rect">
+            <a:avLst/>
+          </a:prstGeom>
+          <a:noFill/>
+        </p:spPr>
+        <p:txBody>
+          <a:bodyPr wrap="square" rtlCol="0">
+            <a:spAutoFit/>
+          </a:bodyPr>
+          <a:lstStyle/>
+          <a:p>
+            <a:r>
+              <a:rPr lang="en-US" sz="1500">
+                <a:solidFill>
+                  <a:schemeClr val="bg1"/>
+                </a:solidFill>
+              </a:rPr>
+              <a:t>MOTTO :</a:t>
+            </a:r>
+          </a:p>
+        </p:txBody>
+      </p:sp>
+      <p:sp>
+        <p:nvSpPr>
+          <p:cNvPr id="13" name="TextBox 12">
+            <a:extLst>
+              <a:ext uri="{FF2B5EF4-FFF2-40B4-BE49-F238E27FC236}">
+                <a16:creationId xmlns:a16="http://schemas.microsoft.com/office/drawing/2014/main" id="{C269308B-CD5C-62F9-7FF1-462B5BFB12C6}"/>
+              </a:ext>
+            </a:extLst>
+          </p:cNvPr>
+          <p:cNvSpPr txBox="1"/>
+          <p:nvPr/>
+        </p:nvSpPr>
+        <p:spPr>
+          <a:xfrm>
+            <a:off x="834508" y="3833128"/>
+            <a:ext cx="5259418" cy="323165"/>
+          </a:xfrm>
+          <a:prstGeom prst="rect">
+            <a:avLst/>
+          </a:prstGeom>
+          <a:noFill/>
+        </p:spPr>
+        <p:txBody>
+          <a:bodyPr wrap="square" rtlCol="0">
+            <a:spAutoFit/>
+          </a:bodyPr>
+          <a:lstStyle/>
+          <a:p>
+            <a:r>
+              <a:rPr lang="en-US" sz="1500">
+                <a:solidFill>
+                  <a:schemeClr val="bg1"/>
+                </a:solidFill>
+              </a:rPr>
+              <a:t>PENGALAMAN BERKESAN :</a:t>
+            </a:r>
+          </a:p>
+        </p:txBody>
+      </p:sp>
       <p:pic>
         <p:nvPicPr>
-          <p:cNvPr id="7" name="Picture 6">
+          <p:cNvPr id="14" name="Aiko">
+            <a:hlinkClick r:id="" action="ppaction://media"/>
             <a:extLst>
               <a:ext uri="{FF2B5EF4-FFF2-40B4-BE49-F238E27FC236}">
-                <a16:creationId xmlns:a16="http://schemas.microsoft.com/office/drawing/2014/main" id="{C0DAAC4B-9273-F6C9-4454-95F973877CF5}"/>
+                <a16:creationId xmlns:a16="http://schemas.microsoft.com/office/drawing/2014/main" id="{0A47E87F-C247-44B4-C125-6B316AEA2385}"/>
               </a:ext>
             </a:extLst>
           </p:cNvPr>
           <p:cNvPicPr>
             <a:picLocks noChangeAspect="1"/>
           </p:cNvPicPr>
-          <p:nvPr/>
+          <p:nvPr>
+            <a:videoFile r:link="rId2"/>
+            <p:extLst>
+              <p:ext uri="{DAA4B4D4-6D71-4841-9C94-3DE7FCFB9230}">
+                <p14:media xmlns:p14="http://schemas.microsoft.com/office/powerpoint/2010/main" r:embed="rId1"/>
+              </p:ext>
+            </p:extLst>
+          </p:nvPr>
         </p:nvPicPr>
         <p:blipFill>
-          <a:blip r:embed="rId4" cstate="print">
-            <a:extLst>
-              <a:ext uri="{28A0092B-C50C-407E-A947-70E740481C1C}">
-                <a14:useLocalDpi xmlns:a14="http://schemas.microsoft.com/office/drawing/2010/main" val="0"/>
-              </a:ext>
-            </a:extLst>
-          </a:blip>
+          <a:blip r:embed="rId6"/>
           <a:stretch>
             <a:fillRect/>
           </a:stretch>
         </p:blipFill>
         <p:spPr>
           <a:xfrm>
-            <a:off x="7590412" y="836578"/>
-            <a:ext cx="5143500" cy="6858000"/>
+            <a:off x="7091464" y="19118"/>
+            <a:ext cx="5095945" cy="6794593"/>
           </a:xfrm>
           <a:prstGeom prst="rect">
             <a:avLst/>
@@ -3540,6 +3895,141 @@
   <p:clrMapOvr>
     <a:masterClrMapping/>
   </p:clrMapOvr>
+  <p:timing>
+    <p:tnLst>
+      <p:par>
+        <p:cTn id="1" dur="indefinite" restart="never" nodeType="tmRoot">
+          <p:childTnLst>
+            <p:seq concurrent="1" nextAc="seek">
+              <p:cTn id="2" dur="indefinite" nodeType="mainSeq">
+                <p:childTnLst>
+                  <p:par>
+                    <p:cTn id="3" fill="hold">
+                      <p:stCondLst>
+                        <p:cond delay="indefinite"/>
+                      </p:stCondLst>
+                      <p:childTnLst>
+                        <p:par>
+                          <p:cTn id="4" fill="hold">
+                            <p:stCondLst>
+                              <p:cond delay="0"/>
+                            </p:stCondLst>
+                            <p:childTnLst>
+                              <p:par>
+                                <p:cTn id="5" presetID="1" presetClass="mediacall" presetSubtype="0" fill="hold" nodeType="clickEffect">
+                                  <p:stCondLst>
+                                    <p:cond delay="0"/>
+                                  </p:stCondLst>
+                                  <p:childTnLst>
+                                    <p:cmd type="call" cmd="playFrom(0.0)">
+                                      <p:cBhvr>
+                                        <p:cTn id="6" dur="3042" fill="hold"/>
+                                        <p:tgtEl>
+                                          <p:spTgt spid="14"/>
+                                        </p:tgtEl>
+                                      </p:cBhvr>
+                                    </p:cmd>
+                                  </p:childTnLst>
+                                </p:cTn>
+                              </p:par>
+                            </p:childTnLst>
+                          </p:cTn>
+                        </p:par>
+                      </p:childTnLst>
+                    </p:cTn>
+                  </p:par>
+                </p:childTnLst>
+              </p:cTn>
+              <p:prevCondLst>
+                <p:cond evt="onPrev" delay="0">
+                  <p:tgtEl>
+                    <p:sldTgt/>
+                  </p:tgtEl>
+                </p:cond>
+              </p:prevCondLst>
+              <p:nextCondLst>
+                <p:cond evt="onNext" delay="0">
+                  <p:tgtEl>
+                    <p:sldTgt/>
+                  </p:tgtEl>
+                </p:cond>
+              </p:nextCondLst>
+            </p:seq>
+            <p:video>
+              <p:cMediaNode vol="80000">
+                <p:cTn id="7" fill="hold" display="0">
+                  <p:stCondLst>
+                    <p:cond delay="indefinite"/>
+                  </p:stCondLst>
+                </p:cTn>
+                <p:tgtEl>
+                  <p:spTgt spid="14"/>
+                </p:tgtEl>
+              </p:cMediaNode>
+            </p:video>
+            <p:seq concurrent="1" nextAc="seek">
+              <p:cTn id="8" restart="whenNotActive" fill="hold" evtFilter="cancelBubble" nodeType="interactiveSeq">
+                <p:stCondLst>
+                  <p:cond evt="onClick" delay="0">
+                    <p:tgtEl>
+                      <p:spTgt spid="14"/>
+                    </p:tgtEl>
+                  </p:cond>
+                </p:stCondLst>
+                <p:endSync evt="end" delay="0">
+                  <p:rtn val="all"/>
+                </p:endSync>
+                <p:childTnLst>
+                  <p:par>
+                    <p:cTn id="9" fill="hold">
+                      <p:stCondLst>
+                        <p:cond delay="0"/>
+                      </p:stCondLst>
+                      <p:childTnLst>
+                        <p:par>
+                          <p:cTn id="10" fill="hold">
+                            <p:stCondLst>
+                              <p:cond delay="0"/>
+                            </p:stCondLst>
+                            <p:childTnLst>
+                              <p:par>
+                                <p:cTn id="11" presetID="2" presetClass="mediacall" presetSubtype="0" fill="hold" nodeType="clickEffect">
+                                  <p:stCondLst>
+                                    <p:cond delay="0"/>
+                                  </p:stCondLst>
+                                  <p:childTnLst>
+                                    <p:cmd type="call" cmd="togglePause">
+                                      <p:cBhvr>
+                                        <p:cTn id="12" dur="1" fill="hold"/>
+                                        <p:tgtEl>
+                                          <p:spTgt spid="14"/>
+                                        </p:tgtEl>
+                                      </p:cBhvr>
+                                    </p:cmd>
+                                  </p:childTnLst>
+                                </p:cTn>
+                              </p:par>
+                            </p:childTnLst>
+                          </p:cTn>
+                        </p:par>
+                      </p:childTnLst>
+                    </p:cTn>
+                  </p:par>
+                </p:childTnLst>
+              </p:cTn>
+              <p:nextCondLst>
+                <p:cond evt="onClick" delay="0">
+                  <p:tgtEl>
+                    <p:spTgt spid="14"/>
+                  </p:tgtEl>
+                </p:cond>
+              </p:nextCondLst>
+            </p:seq>
+          </p:childTnLst>
+        </p:cTn>
+      </p:par>
+    </p:tnLst>
+  </p:timing>
 </p:sld>
 </file>
 
